--- a/生成的课件/02_管理经济学_第02章_需求分析与需求弹性.pptx
+++ b/生成的课件/02_管理经济学_第02章_需求分析与需求弹性.pptx
@@ -4313,7 +4313,7 @@
                 <a:latin typeface="Times New Roman"/>
                 <a:ea typeface="宋体"/>
               </a:rPr>
-              <a:t>  1. 需求收入弹性公式与判定</a:t>
+              <a:t>1. 需求收入弹性公式与判定</a:t>
             </a:r>
           </a:p>
         </p:txBody>
@@ -4356,7 +4356,7 @@
                 <a:latin typeface="Times New Roman"/>
                 <a:ea typeface="宋体"/>
               </a:rPr>
-              <a:t>（1）计算公式： </a:t>
+              <a:t>（1）计算公式：</a:t>
             </a:r>
             <a:r>
               <a:rPr sz="1150" b="0">
@@ -4366,7 +4366,7 @@
                 <a:latin typeface="Times New Roman"/>
                 <a:ea typeface="宋体"/>
               </a:rPr>
-              <a:t>E_i = \frac{\Delta Q / Q}{\Delta I / I} = \frac{dQ}{dI} \cdot \frac{I}{Q}</a:t>
+              <a:t>Eᵢ = (Δ Q / Q) / (Δ I / I) = dQ / dI · I / Q</a:t>
             </a:r>
           </a:p>
           <a:p>
@@ -4386,7 +4386,7 @@
                 <a:latin typeface="Times New Roman"/>
                 <a:ea typeface="宋体"/>
               </a:rPr>
-              <a:t>（2）正常品（Normal Goods, E_i &gt; 0）： </a:t>
+              <a:t>（2）正常品（Normal Goods, Eᵢ &gt; 0）：</a:t>
             </a:r>
             <a:r>
               <a:rPr sz="1150" b="0">
@@ -4416,7 +4416,7 @@
                 <a:latin typeface="Times New Roman"/>
                 <a:ea typeface="宋体"/>
               </a:rPr>
-              <a:t>   • 奢侈品（Luxury Goods, E_i &gt; 1）： </a:t>
+              <a:t>• 奢侈品（Luxury Goods, Eᵢ &gt; 1）：</a:t>
             </a:r>
             <a:r>
               <a:rPr sz="1150" b="0">
@@ -4446,7 +4446,7 @@
                 <a:latin typeface="Times New Roman"/>
                 <a:ea typeface="宋体"/>
               </a:rPr>
-              <a:t>   • 必需品（Necessities, 0 &lt; E_i &lt; 1）： </a:t>
+              <a:t>• 必需品（Necessities, 0 &lt; Eᵢ &lt; 1）：</a:t>
             </a:r>
             <a:r>
               <a:rPr sz="1150" b="0">
@@ -4476,7 +4476,7 @@
                 <a:latin typeface="Times New Roman"/>
                 <a:ea typeface="宋体"/>
               </a:rPr>
-              <a:t>（3）劣等品（Inferior Goods, E_i &lt; 0）： </a:t>
+              <a:t>（3）劣等品（Inferior Goods, Eᵢ &lt; 0）：</a:t>
             </a:r>
             <a:r>
               <a:rPr sz="1150" b="0">
@@ -4586,7 +4586,7 @@
                 <a:latin typeface="Times New Roman"/>
                 <a:ea typeface="宋体"/>
               </a:rPr>
-              <a:t>  2. 收入弹性对企业赛道布局的指导</a:t>
+              <a:t>2. 收入弹性对企业赛道布局的指导</a:t>
             </a:r>
           </a:p>
         </p:txBody>
@@ -4629,7 +4629,7 @@
                 <a:latin typeface="Times New Roman"/>
                 <a:ea typeface="宋体"/>
               </a:rPr>
-              <a:t>（1）经济繁荣扩张期： </a:t>
+              <a:t>（1）经济繁荣扩张期：</a:t>
             </a:r>
             <a:r>
               <a:rPr sz="1250" b="0">
@@ -4639,7 +4639,7 @@
                 <a:latin typeface="Times New Roman"/>
                 <a:ea typeface="宋体"/>
               </a:rPr>
-              <a:t>居民收入快速增长，重点投资 E_i &gt; 1 的高弹性成长型消费品与高端服务业。</a:t>
+              <a:t>居民收入快速增长，重点投资 Eᵢ &gt; 1 的高弹性成长型消费品与高端服务业。</a:t>
             </a:r>
           </a:p>
           <a:p>
@@ -4659,7 +4659,7 @@
                 <a:latin typeface="Times New Roman"/>
                 <a:ea typeface="宋体"/>
               </a:rPr>
-              <a:t>（2）经济周期衰退期： </a:t>
+              <a:t>（2）经济周期衰退期：</a:t>
             </a:r>
             <a:r>
               <a:rPr sz="1250" b="0">
@@ -4669,7 +4669,7 @@
                 <a:latin typeface="Times New Roman"/>
                 <a:ea typeface="宋体"/>
               </a:rPr>
-              <a:t>居民预算收紧，E_i &lt; 0 的平价折扣零售与二手循环经济展现出极强防御逆势增长特征。</a:t>
+              <a:t>居民预算收紧，Eᵢ &lt; 0 的平价折扣零售与二手循环经济展现出极强防御逆势增长特征。</a:t>
             </a:r>
           </a:p>
         </p:txBody>
@@ -4726,7 +4726,7 @@
                 <a:latin typeface="Times New Roman"/>
                 <a:ea typeface="宋体"/>
               </a:rPr>
-              <a:t>  ★ 核心要点：收入弹性揭示了消费结构随经济增长升级的宏观规律，是企业把握赛道红利的指南针。</a:t>
+              <a:t>★ 核心要点：收入弹性揭示了消费结构随经济增长升级的宏观规律，是企业把握赛道红利的指南针。</a:t>
             </a:r>
           </a:p>
         </p:txBody>
@@ -5133,7 +5133,7 @@
                 <a:latin typeface="Times New Roman"/>
                 <a:ea typeface="宋体"/>
               </a:rPr>
-              <a:t>  1. 恩格尔定律（Engel's Law）的内涵与联合国标准</a:t>
+              <a:t>1. 恩格尔定律（Engel's Law）的内涵与联合国标准</a:t>
             </a:r>
           </a:p>
         </p:txBody>
@@ -5176,7 +5176,7 @@
                 <a:latin typeface="Times New Roman"/>
                 <a:ea typeface="宋体"/>
               </a:rPr>
-              <a:t>（1）恩格尔定律表述： </a:t>
+              <a:t>（1）恩格尔定律表述：</a:t>
             </a:r>
             <a:r>
               <a:rPr sz="1150" b="0">
@@ -5206,7 +5206,7 @@
                 <a:latin typeface="Times New Roman"/>
                 <a:ea typeface="宋体"/>
               </a:rPr>
-              <a:t>（2）恩格尔系数公式： </a:t>
+              <a:t>（2）恩格尔系数公式：</a:t>
             </a:r>
             <a:r>
               <a:rPr sz="1150" b="0">
@@ -5216,7 +5216,7 @@
                 <a:latin typeface="Times New Roman"/>
                 <a:ea typeface="宋体"/>
               </a:rPr>
-              <a:t>\text{恩格尔系数} = \frac{\text{食品支出总额}}{\text{个人消费支出总额}} \times 100\%</a:t>
+              <a:t>恩格尔系数 = (食品支出总额) / (个人消费支出总额) × 100%</a:t>
             </a:r>
           </a:p>
           <a:p>
@@ -5236,7 +5236,7 @@
                 <a:latin typeface="Times New Roman"/>
                 <a:ea typeface="宋体"/>
               </a:rPr>
-              <a:t>（3）联合国富裕程度量化划分标准： </a:t>
+              <a:t>（3）联合国富裕程度量化划分标准：</a:t>
             </a:r>
             <a:r>
               <a:rPr sz="1150" b="0">
@@ -5266,7 +5266,7 @@
                 <a:latin typeface="Times New Roman"/>
                 <a:ea typeface="宋体"/>
               </a:rPr>
-              <a:t>   • &gt; 59%：绝对贫困； </a:t>
+              <a:t>• &gt; 59%：绝对贫困；</a:t>
             </a:r>
             <a:r>
               <a:rPr sz="1150" b="0">
@@ -5296,7 +5296,7 @@
                 <a:latin typeface="Times New Roman"/>
                 <a:ea typeface="宋体"/>
               </a:rPr>
-              <a:t>   • 40% ~ 50%：小康水平； </a:t>
+              <a:t>• 40% ~ 50%：小康水平；</a:t>
             </a:r>
             <a:r>
               <a:rPr sz="1150" b="0">
@@ -5406,7 +5406,7 @@
                 <a:latin typeface="Times New Roman"/>
                 <a:ea typeface="宋体"/>
               </a:rPr>
-              <a:t>  2. 案例2-1/2-2：产业演进与企业战略转型</a:t>
+              <a:t>2. 案例2-1/2-2：产业演进与企业战略转型</a:t>
             </a:r>
           </a:p>
         </p:txBody>
@@ -5449,7 +5449,7 @@
                 <a:latin typeface="Times New Roman"/>
                 <a:ea typeface="宋体"/>
               </a:rPr>
-              <a:t>（1）第一产业占比下降： </a:t>
+              <a:t>（1）第一产业占比下降：</a:t>
             </a:r>
             <a:r>
               <a:rPr sz="1250" b="0">
@@ -5479,7 +5479,7 @@
                 <a:latin typeface="Times New Roman"/>
                 <a:ea typeface="宋体"/>
               </a:rPr>
-              <a:t>（2）第三产业蓬勃兴起： </a:t>
+              <a:t>（2）第三产业蓬勃兴起：</a:t>
             </a:r>
             <a:r>
               <a:rPr sz="1250" b="0">
@@ -5509,7 +5509,7 @@
                 <a:latin typeface="Times New Roman"/>
                 <a:ea typeface="宋体"/>
               </a:rPr>
-              <a:t>（3）企业战略启示： </a:t>
+              <a:t>（3）企业战略启示：</a:t>
             </a:r>
             <a:r>
               <a:rPr sz="1250" b="0">
@@ -5576,7 +5576,7 @@
                 <a:latin typeface="Times New Roman"/>
                 <a:ea typeface="宋体"/>
               </a:rPr>
-              <a:t>  ★ 核心要点：恩格尔定律是人类消费升级的客观规律，为国家宏观产业政策与企业跨界转型指明了方向。</a:t>
+              <a:t>★ 核心要点：恩格尔定律是人类消费升级的客观规律，为国家宏观产业政策与企业跨界转型指明了方向。</a:t>
             </a:r>
           </a:p>
         </p:txBody>
@@ -5983,7 +5983,7 @@
                 <a:latin typeface="Times New Roman"/>
                 <a:ea typeface="宋体"/>
               </a:rPr>
-              <a:t>  1. 凡勃伦效应（Veblen Goods）与炫耀性消费</a:t>
+              <a:t>1. 凡勃伦效应（Veblen Goods）与炫耀性消费</a:t>
             </a:r>
           </a:p>
         </p:txBody>
@@ -6026,7 +6026,7 @@
                 <a:latin typeface="Times New Roman"/>
                 <a:ea typeface="宋体"/>
               </a:rPr>
-              <a:t>（1）传统收入弹性理论： </a:t>
+              <a:t>（1）传统收入弹性理论：</a:t>
             </a:r>
             <a:r>
               <a:rPr sz="1250" b="0">
@@ -6036,7 +6036,7 @@
                 <a:latin typeface="Times New Roman"/>
                 <a:ea typeface="宋体"/>
               </a:rPr>
-              <a:t>奢侈品由于满足社交认同与心理审美需求，收入弹性 E_i 往往远大于 2。</a:t>
+              <a:t>奢侈品由于满足社交认同与心理审美需求，收入弹性 Eᵢ 往往远大于 2。</a:t>
             </a:r>
           </a:p>
           <a:p>
@@ -6056,7 +6056,7 @@
                 <a:latin typeface="Times New Roman"/>
                 <a:ea typeface="宋体"/>
               </a:rPr>
-              <a:t>（2）凡勃伦效应特异性： </a:t>
+              <a:t>（2）凡勃伦效应特异性：</a:t>
             </a:r>
             <a:r>
               <a:rPr sz="1250" b="0">
@@ -6086,7 +6086,7 @@
                 <a:latin typeface="Times New Roman"/>
                 <a:ea typeface="宋体"/>
               </a:rPr>
-              <a:t>（3）核心商业机理： </a:t>
+              <a:t>（3）核心商业机理：</a:t>
             </a:r>
             <a:r>
               <a:rPr sz="1250" b="0">
@@ -6196,7 +6196,7 @@
                 <a:latin typeface="Times New Roman"/>
                 <a:ea typeface="宋体"/>
               </a:rPr>
-              <a:t>  2. 奢侈品品牌的运营与定价管理法则</a:t>
+              <a:t>2. 奢侈品品牌的运营与定价管理法则</a:t>
             </a:r>
           </a:p>
         </p:txBody>
@@ -6239,7 +6239,7 @@
                 <a:latin typeface="Times New Roman"/>
                 <a:ea typeface="宋体"/>
               </a:rPr>
-              <a:t>（1）保持绝对稀缺性： </a:t>
+              <a:t>（1）保持绝对稀缺性：</a:t>
             </a:r>
             <a:r>
               <a:rPr sz="1250" b="0">
@@ -6269,7 +6269,7 @@
                 <a:latin typeface="Times New Roman"/>
                 <a:ea typeface="宋体"/>
               </a:rPr>
-              <a:t>（2）逆势定期提价： </a:t>
+              <a:t>（2）逆势定期提价：</a:t>
             </a:r>
             <a:r>
               <a:rPr sz="1250" b="0">
@@ -6336,7 +6336,7 @@
                 <a:latin typeface="Times New Roman"/>
                 <a:ea typeface="宋体"/>
               </a:rPr>
-              <a:t>  ★ 核心要点：奢侈品运营颠覆了传统降价促销思维，依靠高收入弹性与凡勃伦效应构筑顶级品牌溢价。</a:t>
+              <a:t>★ 核心要点：奢侈品运营颠覆了传统降价促销思维，依靠高收入弹性与凡勃伦效应构筑顶级品牌溢价。</a:t>
             </a:r>
           </a:p>
         </p:txBody>
@@ -7050,7 +7050,7 @@
                 <a:latin typeface="Times New Roman"/>
                 <a:ea typeface="宋体"/>
               </a:rPr>
-              <a:t>  1. 交叉价格弹性公式界定</a:t>
+              <a:t>1. 交叉价格弹性公式界定</a:t>
             </a:r>
           </a:p>
         </p:txBody>
@@ -7093,7 +7093,7 @@
                 <a:latin typeface="Times New Roman"/>
                 <a:ea typeface="宋体"/>
               </a:rPr>
-              <a:t>（1）计算公式： </a:t>
+              <a:t>（1）计算公式：</a:t>
             </a:r>
             <a:r>
               <a:rPr sz="1250" b="0">
@@ -7103,7 +7103,7 @@
                 <a:latin typeface="Times New Roman"/>
                 <a:ea typeface="宋体"/>
               </a:rPr>
-              <a:t>E_{xy} = \frac{\Delta Q_x / Q_x}{\Delta P_y / P_y} = \frac{dQ_x}{dP_y} \cdot \frac{P_y}{Q_x}</a:t>
+              <a:t>Exy = (Δ Q_x / Q_x) / (Δ P_y / P_y) = dQ_x / dP_y · P_y / Q_x</a:t>
             </a:r>
           </a:p>
           <a:p>
@@ -7123,7 +7123,7 @@
                 <a:latin typeface="Times New Roman"/>
                 <a:ea typeface="宋体"/>
               </a:rPr>
-              <a:t>（2）替代品关系 (E_{xy} &gt; 0)： </a:t>
+              <a:t>（2）替代品关系 (Exy &gt; 0)：</a:t>
             </a:r>
             <a:r>
               <a:rPr sz="1250" b="0">
@@ -7133,7 +7133,7 @@
                 <a:latin typeface="Times New Roman"/>
                 <a:ea typeface="宋体"/>
               </a:rPr>
-              <a:t>Y 产品价格上涨 \implies X 产品需求增加（同向变动）。E_{xy} 正值越大，两产品替代性越强（如可口可乐与百事可乐）。</a:t>
+              <a:t>Y 产品价格上涨 ⇒ X 产品需求增加（同向变动）。Exy 正值越大，两产品替代性越强（如可口可乐与百事可乐）。</a:t>
             </a:r>
           </a:p>
           <a:p>
@@ -7153,7 +7153,7 @@
                 <a:latin typeface="Times New Roman"/>
                 <a:ea typeface="宋体"/>
               </a:rPr>
-              <a:t>（3）互补品关系 (E_{xy} &lt; 0)： </a:t>
+              <a:t>（3）互补品关系 (Exy &lt; 0)：</a:t>
             </a:r>
             <a:r>
               <a:rPr sz="1250" b="0">
@@ -7163,7 +7163,7 @@
                 <a:latin typeface="Times New Roman"/>
                 <a:ea typeface="宋体"/>
               </a:rPr>
-              <a:t>Y 产品价格上涨 \implies X 产品需求减少（反向变动）。E_{xy} 负绝对值越大，互补配套性越强（如汽车与汽油、打印机与墨盒）。</a:t>
+              <a:t>Y 产品价格上涨 ⇒ X 产品需求减少（反向变动）。Exy 负绝对值越大，互补配套性越强（如汽车与汽油、打印机与墨盒）。</a:t>
             </a:r>
           </a:p>
           <a:p>
@@ -7183,7 +7183,7 @@
                 <a:latin typeface="Times New Roman"/>
                 <a:ea typeface="宋体"/>
               </a:rPr>
-              <a:t>（4）独立品关系 (E_{xy} = 0)： </a:t>
+              <a:t>（4）独立品关系 (Exy = 0)：</a:t>
             </a:r>
             <a:r>
               <a:rPr sz="1250" b="0">
@@ -7293,7 +7293,7 @@
                 <a:latin typeface="Times New Roman"/>
                 <a:ea typeface="宋体"/>
               </a:rPr>
-              <a:t>  2. 交叉弹性的反垄断与反不正当竞争应用</a:t>
+              <a:t>2. 交叉弹性的反垄断与反不正当竞争应用</a:t>
             </a:r>
           </a:p>
         </p:txBody>
@@ -7336,7 +7336,7 @@
                 <a:latin typeface="Times New Roman"/>
                 <a:ea typeface="宋体"/>
               </a:rPr>
-              <a:t>（1）相关市场界定（Relevant Market）： </a:t>
+              <a:t>（1）相关市场界定（Relevant Market）：</a:t>
             </a:r>
             <a:r>
               <a:rPr sz="1250" b="0">
@@ -7346,7 +7346,7 @@
                 <a:latin typeface="Times New Roman"/>
                 <a:ea typeface="宋体"/>
               </a:rPr>
-              <a:t>在反垄断执法中，若两种商品交叉弹性 E_{xy} 极高，证明它们处于同一相关商品市场。</a:t>
+              <a:t>在反垄断执法中，若两种商品交叉弹性 Exy 极高，证明它们处于同一相关商品市场。</a:t>
             </a:r>
           </a:p>
           <a:p>
@@ -7366,7 +7366,7 @@
                 <a:latin typeface="Times New Roman"/>
                 <a:ea typeface="宋体"/>
               </a:rPr>
-              <a:t>（2）并购审查标准： </a:t>
+              <a:t>（2）并购审查标准：</a:t>
             </a:r>
             <a:r>
               <a:rPr sz="1250" b="0">
@@ -7433,7 +7433,7 @@
                 <a:latin typeface="Times New Roman"/>
                 <a:ea typeface="宋体"/>
               </a:rPr>
-              <a:t>  ★ 核心要点：交叉弹性是反垄断市场界定的法理依据，也是企业识别隐形竞争对手的核心雷达。</a:t>
+              <a:t>★ 核心要点：交叉弹性是反垄断市场界定的法理依据，也是企业识别隐形竞争对手的核心雷达。</a:t>
             </a:r>
           </a:p>
         </p:txBody>
@@ -7840,7 +7840,7 @@
                 <a:latin typeface="Times New Roman"/>
                 <a:ea typeface="宋体"/>
               </a:rPr>
-              <a:t>  1. 互补产品'两部收费制'（Two-Part Tariff）</a:t>
+              <a:t>1. 互补产品'两部收费制'（Two-Part Tariff）</a:t>
             </a:r>
           </a:p>
         </p:txBody>
@@ -7883,7 +7883,7 @@
                 <a:latin typeface="Times New Roman"/>
                 <a:ea typeface="宋体"/>
               </a:rPr>
-              <a:t>（1）经典吉列剃须刀模式： </a:t>
+              <a:t>（1）经典吉列剃须刀模式：</a:t>
             </a:r>
             <a:r>
               <a:rPr sz="1250" b="0">
@@ -7913,7 +7913,7 @@
                 <a:latin typeface="Times New Roman"/>
                 <a:ea typeface="宋体"/>
               </a:rPr>
-              <a:t>（2）耗材高毛利锁定： </a:t>
+              <a:t>（2）耗材高毛利锁定：</a:t>
             </a:r>
             <a:r>
               <a:rPr sz="1250" b="0">
@@ -7943,7 +7943,7 @@
                 <a:latin typeface="Times New Roman"/>
                 <a:ea typeface="宋体"/>
               </a:rPr>
-              <a:t>（3）现代商业拓展： </a:t>
+              <a:t>（3）现代商业拓展：</a:t>
             </a:r>
             <a:r>
               <a:rPr sz="1250" b="0">
@@ -8053,7 +8053,7 @@
                 <a:latin typeface="Times New Roman"/>
                 <a:ea typeface="宋体"/>
               </a:rPr>
-              <a:t>  2. 搭售（Tying）、捆绑定价与同门相残防范</a:t>
+              <a:t>2. 搭售（Tying）、捆绑定价与同门相残防范</a:t>
             </a:r>
           </a:p>
         </p:txBody>
@@ -8096,7 +8096,7 @@
                 <a:latin typeface="Times New Roman"/>
                 <a:ea typeface="宋体"/>
               </a:rPr>
-              <a:t>（1）纯捆绑定价（Pure Bundling）： </a:t>
+              <a:t>（1）纯捆绑定价（Pure Bundling）：</a:t>
             </a:r>
             <a:r>
               <a:rPr sz="1250" b="0">
@@ -8126,7 +8126,7 @@
                 <a:latin typeface="Times New Roman"/>
                 <a:ea typeface="宋体"/>
               </a:rPr>
-              <a:t>（2）防范内部同门相残（Cannibalization）： </a:t>
+              <a:t>（2）防范内部同门相残（Cannibalization）：</a:t>
             </a:r>
             <a:r>
               <a:rPr sz="1250" b="0">
@@ -8193,7 +8193,7 @@
                 <a:latin typeface="Times New Roman"/>
                 <a:ea typeface="宋体"/>
               </a:rPr>
-              <a:t>  ★ 核心要点：多产品定价的精髓在于跳出单品核算局限，通过交叉弹性联动最大化企业全产品矩阵总利润。</a:t>
+              <a:t>★ 核心要点：多产品定价的精髓在于跳出单品核算局限，通过交叉弹性联动最大化企业全产品矩阵总利润。</a:t>
             </a:r>
           </a:p>
         </p:txBody>
@@ -8907,7 +8907,7 @@
                 <a:latin typeface="Times New Roman"/>
                 <a:ea typeface="宋体"/>
               </a:rPr>
-              <a:t>  1. 广告弹性（Advertising Elasticity）公式</a:t>
+              <a:t>1. 广告弹性（Advertising Elasticity）公式</a:t>
             </a:r>
           </a:p>
         </p:txBody>
@@ -8950,7 +8950,7 @@
                 <a:latin typeface="Times New Roman"/>
                 <a:ea typeface="宋体"/>
               </a:rPr>
-              <a:t>（1）计算公式： </a:t>
+              <a:t>（1）计算公式：</a:t>
             </a:r>
             <a:r>
               <a:rPr sz="1250" b="0">
@@ -8960,7 +8960,7 @@
                 <a:latin typeface="Times New Roman"/>
                 <a:ea typeface="宋体"/>
               </a:rPr>
-              <a:t>E_a = \frac{\Delta Q / Q}{\Delta A / A} = \frac{dQ}{dA} \cdot \frac{A}{Q} \quad (A: 广告营销总支出)</a:t>
+              <a:t>Ea = (Δ Q / Q) / (Δ A / A) = dQ / dA · A / Q (A: 广告营销总支出)</a:t>
             </a:r>
           </a:p>
           <a:p>
@@ -8980,7 +8980,7 @@
                 <a:latin typeface="Times New Roman"/>
                 <a:ea typeface="宋体"/>
               </a:rPr>
-              <a:t>（2）经济学含义： </a:t>
+              <a:t>（2）经济学含义：</a:t>
             </a:r>
             <a:r>
               <a:rPr sz="1250" b="0">
@@ -9010,7 +9010,7 @@
                 <a:latin typeface="Times New Roman"/>
                 <a:ea typeface="宋体"/>
               </a:rPr>
-              <a:t>（3）广告拉动机制： </a:t>
+              <a:t>（3）广告拉动机制：</a:t>
             </a:r>
             <a:r>
               <a:rPr sz="1250" b="0">
@@ -9120,7 +9120,7 @@
                 <a:latin typeface="Times New Roman"/>
                 <a:ea typeface="宋体"/>
               </a:rPr>
-              <a:t>  2. 边际广告收益递减与预算边界</a:t>
+              <a:t>2. 边际广告收益递减与预算边界</a:t>
             </a:r>
           </a:p>
         </p:txBody>
@@ -9163,7 +9163,7 @@
                 <a:latin typeface="Times New Roman"/>
                 <a:ea typeface="宋体"/>
               </a:rPr>
-              <a:t>（1）起步阶段（快速上升）： </a:t>
+              <a:t>（1）起步阶段（快速上升）：</a:t>
             </a:r>
             <a:r>
               <a:rPr sz="1250" b="0">
@@ -9173,7 +9173,7 @@
                 <a:latin typeface="Times New Roman"/>
                 <a:ea typeface="宋体"/>
               </a:rPr>
-              <a:t>初期广告投入能迅速打开知名度，E_a 显著大于 0。</a:t>
+              <a:t>初期广告投入能迅速打开知名度，Ea 显著大于 0。</a:t>
             </a:r>
           </a:p>
           <a:p>
@@ -9193,7 +9193,7 @@
                 <a:latin typeface="Times New Roman"/>
                 <a:ea typeface="宋体"/>
               </a:rPr>
-              <a:t>（2）饱和阶段（边际递减）： </a:t>
+              <a:t>（2）饱和阶段（边际递减）：</a:t>
             </a:r>
             <a:r>
               <a:rPr sz="1250" b="0">
@@ -9223,7 +9223,7 @@
                 <a:latin typeface="Times New Roman"/>
                 <a:ea typeface="宋体"/>
               </a:rPr>
-              <a:t>（3）营销预算终止准则： </a:t>
+              <a:t>（3）营销预算终止准则：</a:t>
             </a:r>
             <a:r>
               <a:rPr sz="1250" b="0">
@@ -9290,7 +9290,7 @@
                 <a:latin typeface="Times New Roman"/>
                 <a:ea typeface="宋体"/>
               </a:rPr>
-              <a:t>  ★ 核心要点：广告投放绝非多多益善，掌握广告弹性递减规律是避免营销预算无谓烧钱的科学防线。</a:t>
+              <a:t>★ 核心要点：广告投放绝非多多益善，掌握广告弹性递减规律是避免营销预算无谓烧钱的科学防线。</a:t>
             </a:r>
           </a:p>
         </p:txBody>
@@ -9697,7 +9697,7 @@
                 <a:latin typeface="Times New Roman"/>
                 <a:ea typeface="宋体"/>
               </a:rPr>
-              <a:t>  1. 定理数学推导与黄金方程</a:t>
+              <a:t>1. 定理数学推导与黄金方程</a:t>
             </a:r>
           </a:p>
         </p:txBody>
@@ -9740,7 +9740,7 @@
                 <a:latin typeface="Times New Roman"/>
                 <a:ea typeface="宋体"/>
               </a:rPr>
-              <a:t>（1）利润函数设定： </a:t>
+              <a:t>（1）利润函数设定：</a:t>
             </a:r>
             <a:r>
               <a:rPr sz="1250" b="0">
@@ -9750,7 +9750,7 @@
                 <a:latin typeface="Times New Roman"/>
                 <a:ea typeface="宋体"/>
               </a:rPr>
-              <a:t>\pi(P, A) = P \cdot Q(P, A) - TC(Q) - A</a:t>
+              <a:t>π(P, A) = P · Q(P, A) - TC(Q) - A</a:t>
             </a:r>
           </a:p>
           <a:p>
@@ -9770,7 +9770,7 @@
                 <a:latin typeface="Times New Roman"/>
                 <a:ea typeface="宋体"/>
               </a:rPr>
-              <a:t>（2）对 P 与 A 分别求偏导并令其为 0： </a:t>
+              <a:t>（2）对 P 与 A 分别求偏导并令其为 0：</a:t>
             </a:r>
             <a:r>
               <a:rPr sz="1250" b="0">
@@ -9780,7 +9780,7 @@
                 <a:latin typeface="Times New Roman"/>
                 <a:ea typeface="宋体"/>
               </a:rPr>
-              <a:t>\frac{\partial \pi}{\partial P} = Q + (P - MC)\frac{\partial Q}{\partial P} = 0, \quad \frac{\partial \pi}{\partial A} = (P - MC)\frac{\partial Q}{\partial A} - 1 = 0</a:t>
+              <a:t>(∂ π) / (∂ P) = Q + (P - MC)(∂ Q) / (∂ P) = 0, (∂ π) / (∂ A) = (P - MC)(∂ Q) / (∂ A) - 1 = 0</a:t>
             </a:r>
           </a:p>
           <a:p>
@@ -9800,7 +9800,7 @@
                 <a:latin typeface="Times New Roman"/>
                 <a:ea typeface="宋体"/>
               </a:rPr>
-              <a:t>（3）联立两式消去 (P - MC)： </a:t>
+              <a:t>（3）联立两式消去 (P - MC)：</a:t>
             </a:r>
             <a:r>
               <a:rPr sz="1250" b="0">
@@ -9810,7 +9810,7 @@
                 <a:latin typeface="Times New Roman"/>
                 <a:ea typeface="宋体"/>
               </a:rPr>
-              <a:t>\frac{A^*}{P \cdot Q} = \frac{E_a}{|E_p|} \implies \frac{A^*}{TR} = \frac{E_a}{|E_p|}</a:t>
+              <a:t>(A*) / (P · Q) = (Ea) / (|Ep|) ⇒ (A*) / TR = (Ea) / (|Ep|)</a:t>
             </a:r>
           </a:p>
         </p:txBody>
@@ -9910,7 +9910,7 @@
                 <a:latin typeface="Times New Roman"/>
                 <a:ea typeface="宋体"/>
               </a:rPr>
-              <a:t>  2. 定理的三大实战管理启示</a:t>
+              <a:t>2. 定理的三大实战管理启示</a:t>
             </a:r>
           </a:p>
         </p:txBody>
@@ -9953,7 +9953,7 @@
                 <a:latin typeface="Times New Roman"/>
                 <a:ea typeface="宋体"/>
               </a:rPr>
-              <a:t>（1）最优广告费占比： </a:t>
+              <a:t>（1）最优广告费占比：</a:t>
             </a:r>
             <a:r>
               <a:rPr sz="1250" b="0">
@@ -9983,7 +9983,7 @@
                 <a:latin typeface="Times New Roman"/>
                 <a:ea typeface="宋体"/>
               </a:rPr>
-              <a:t>（2）高差异化高毛利品类（|E_p| 小, E_a 大）： </a:t>
+              <a:t>（2）高差异化高毛利品类（|Ep| 小, Ea 大）：</a:t>
             </a:r>
             <a:r>
               <a:rPr sz="1250" b="0">
@@ -10013,7 +10013,7 @@
                 <a:latin typeface="Times New Roman"/>
                 <a:ea typeface="宋体"/>
               </a:rPr>
-              <a:t>（3）同质化竞争品类（|E_p| 极大）： </a:t>
+              <a:t>（3）同质化竞争品类（|Ep| 极大）：</a:t>
             </a:r>
             <a:r>
               <a:rPr sz="1250" b="0">
@@ -10080,7 +10080,7 @@
                 <a:latin typeface="Times New Roman"/>
                 <a:ea typeface="宋体"/>
               </a:rPr>
-              <a:t>  ★ 核心要点：多尔夫曼-斯泰纳定理将价格弹性与营销投入完美统摄于一体，为市场部预算编制提供精确数理指引。</a:t>
+              <a:t>★ 核心要点：多尔夫曼-斯泰纳定理将价格弹性与营销投入完美统摄于一体，为市场部预算编制提供精确数理指引。</a:t>
             </a:r>
           </a:p>
         </p:txBody>
@@ -12082,7 +12082,7 @@
                 <a:latin typeface="Times New Roman"/>
                 <a:ea typeface="宋体"/>
               </a:rPr>
-              <a:t>  1. 多元乘数对数需求模型</a:t>
+              <a:t>1. 多元乘数对数需求模型</a:t>
             </a:r>
           </a:p>
         </p:txBody>
@@ -12125,7 +12125,7 @@
                 <a:latin typeface="Times New Roman"/>
                 <a:ea typeface="宋体"/>
               </a:rPr>
-              <a:t>（1）多元经验需求方程： </a:t>
+              <a:t>（1）多元经验需求方程：</a:t>
             </a:r>
             <a:r>
               <a:rPr sz="1250" b="0">
@@ -12135,7 +12135,7 @@
                 <a:latin typeface="Times New Roman"/>
                 <a:ea typeface="宋体"/>
               </a:rPr>
-              <a:t>Q = A_0 \cdot P^{\beta_p} \cdot I^{\beta_i} \cdot P_r^{\beta_r} \cdot A^{\beta_a}</a:t>
+              <a:t>Q = A₀ · P^β_p · I^βᵢ · Pᵣ^β_r · A^β_a</a:t>
             </a:r>
           </a:p>
           <a:p>
@@ -12155,7 +12155,7 @@
                 <a:latin typeface="Times New Roman"/>
                 <a:ea typeface="宋体"/>
               </a:rPr>
-              <a:t>（2）对数线性化形式： </a:t>
+              <a:t>（2）对数线性化形式：</a:t>
             </a:r>
             <a:r>
               <a:rPr sz="1250" b="0">
@@ -12165,7 +12165,7 @@
                 <a:latin typeface="Times New Roman"/>
                 <a:ea typeface="宋体"/>
               </a:rPr>
-              <a:t>\ln Q = \ln A_0 + \beta_p \ln P + \beta_i \ln I + \beta_r \ln P_r + \beta_a \ln A</a:t>
+              <a:t>ln Q = ln A₀ + β_p ln P + βᵢ ln I + β_r ln Pᵣ + β_a ln A</a:t>
             </a:r>
           </a:p>
           <a:p>
@@ -12185,7 +12185,7 @@
                 <a:latin typeface="Times New Roman"/>
                 <a:ea typeface="宋体"/>
               </a:rPr>
-              <a:t>（3）系数直接读取： </a:t>
+              <a:t>（3）系数直接读取：</a:t>
             </a:r>
             <a:r>
               <a:rPr sz="1250" b="0">
@@ -12195,7 +12195,7 @@
                 <a:latin typeface="Times New Roman"/>
                 <a:ea typeface="宋体"/>
               </a:rPr>
-              <a:t>\beta_p 即为自身价格弹性，\beta_i 为收入弹性，\beta_r 为交叉弹性，\beta_a 为广告弹性！</a:t>
+              <a:t>β_p 即为自身价格弹性，βᵢ 为收入弹性，β_r 为交叉弹性，β_a 为广告弹性！</a:t>
             </a:r>
           </a:p>
         </p:txBody>
@@ -12295,7 +12295,7 @@
                 <a:latin typeface="Times New Roman"/>
                 <a:ea typeface="宋体"/>
               </a:rPr>
-              <a:t>  2. 综合业务调价与营销预测实战</a:t>
+              <a:t>2. 综合业务调价与营销预测实战</a:t>
             </a:r>
           </a:p>
         </p:txBody>
@@ -12338,7 +12338,7 @@
                 <a:latin typeface="Times New Roman"/>
                 <a:ea typeface="宋体"/>
               </a:rPr>
-              <a:t>（1）预测公式： </a:t>
+              <a:t>（1）预测公式：</a:t>
             </a:r>
             <a:r>
               <a:rPr sz="1250" b="0">
@@ -12348,7 +12348,7 @@
                 <a:latin typeface="Times New Roman"/>
                 <a:ea typeface="宋体"/>
               </a:rPr>
-              <a:t>\frac{\Delta Q}{Q} \approx E_p \frac{\Delta P}{P} + E_i \frac{\Delta I}{I} + E_{xy} \frac{\Delta P_y}{P_y} + E_a \frac{\Delta A}{A}</a:t>
+              <a:t>(Δ Q) / Q ≈ Ep (Δ P) / P + Eᵢ (Δ I) / I + Exy (Δ P_y) / P_y + Ea (Δ A) / A</a:t>
             </a:r>
           </a:p>
           <a:p>
@@ -12368,7 +12368,7 @@
                 <a:latin typeface="Times New Roman"/>
                 <a:ea typeface="宋体"/>
               </a:rPr>
-              <a:t>（2）管理意义： </a:t>
+              <a:t>（2）管理意义：</a:t>
             </a:r>
             <a:r>
               <a:rPr sz="1250" b="0">
@@ -12435,7 +12435,7 @@
                 <a:latin typeface="Times New Roman"/>
                 <a:ea typeface="宋体"/>
               </a:rPr>
-              <a:t>  ★ 核心要点：多元弹性模型是现代商业智能与大数据精准营销进行销售量情景推演的核心算法底座。</a:t>
+              <a:t>★ 核心要点：多元弹性模型是现代商业智能与大数据精准营销进行销售量情景推演的核心算法底座。</a:t>
             </a:r>
           </a:p>
         </p:txBody>
@@ -12842,7 +12842,7 @@
                 <a:latin typeface="Times New Roman"/>
                 <a:ea typeface="宋体"/>
               </a:rPr>
-              <a:t>  价格弹性与总收益</a:t>
+              <a:t>价格弹性与总收益</a:t>
             </a:r>
           </a:p>
         </p:txBody>
@@ -13046,7 +13046,7 @@
                 <a:latin typeface="Times New Roman"/>
                 <a:ea typeface="宋体"/>
               </a:rPr>
-              <a:t>  收入弹性与产业演进</a:t>
+              <a:t>收入弹性与产业演进</a:t>
             </a:r>
           </a:p>
         </p:txBody>
@@ -13250,7 +13250,7 @@
                 <a:latin typeface="Times New Roman"/>
                 <a:ea typeface="宋体"/>
               </a:rPr>
-              <a:t>  交叉弹性与组合定价</a:t>
+              <a:t>交叉弹性与组合定价</a:t>
             </a:r>
           </a:p>
         </p:txBody>
@@ -13454,7 +13454,7 @@
                 <a:latin typeface="Times New Roman"/>
                 <a:ea typeface="宋体"/>
               </a:rPr>
-              <a:t>  广告弹性与营销优化</a:t>
+              <a:t>广告弹性与营销优化</a:t>
             </a:r>
           </a:p>
         </p:txBody>
@@ -13615,7 +13615,7 @@
                 <a:latin typeface="Times New Roman"/>
                 <a:ea typeface="宋体"/>
               </a:rPr>
-              <a:t>  ★ 战略结语：弹性不仅是价格敏感度的刻度尺，更是企业在复杂多变市场中实现精准定价、产品组合协同与营销预算优化的操盘利器。</a:t>
+              <a:t>★ 战略结语：弹性不仅是价格敏感度的刻度尺，更是企业在复杂多变市场中实现精准定价、产品组合协同与营销预算优化的操盘利器。</a:t>
             </a:r>
           </a:p>
         </p:txBody>
@@ -14022,7 +14022,7 @@
                 <a:latin typeface="Times New Roman"/>
                 <a:ea typeface="宋体"/>
               </a:rPr>
-              <a:t>  课后复习思考题与 MBA 讨论案例（严格对应课本习题）</a:t>
+              <a:t>课后复习思考题与 MBA 讨论案例（严格对应课本习题）</a:t>
             </a:r>
           </a:p>
         </p:txBody>
@@ -14065,7 +14065,7 @@
                 <a:latin typeface="Times New Roman"/>
                 <a:ea typeface="宋体"/>
               </a:rPr>
-              <a:t>1. </a:t>
+              <a:t>1.</a:t>
             </a:r>
             <a:r>
               <a:rPr sz="1150" b="0">
@@ -14095,7 +14095,7 @@
                 <a:latin typeface="Times New Roman"/>
                 <a:ea typeface="宋体"/>
               </a:rPr>
-              <a:t>2. </a:t>
+              <a:t>2.</a:t>
             </a:r>
             <a:r>
               <a:rPr sz="1150" b="0">
@@ -14125,7 +14125,7 @@
                 <a:latin typeface="Times New Roman"/>
                 <a:ea typeface="宋体"/>
               </a:rPr>
-              <a:t>3. </a:t>
+              <a:t>3.</a:t>
             </a:r>
             <a:r>
               <a:rPr sz="1150" b="0">
@@ -14155,7 +14155,7 @@
                 <a:latin typeface="Times New Roman"/>
                 <a:ea typeface="宋体"/>
               </a:rPr>
-              <a:t>4. </a:t>
+              <a:t>4.</a:t>
             </a:r>
             <a:r>
               <a:rPr sz="1150" b="0">
@@ -14185,7 +14185,7 @@
                 <a:latin typeface="Times New Roman"/>
                 <a:ea typeface="宋体"/>
               </a:rPr>
-              <a:t>5. </a:t>
+              <a:t>5.</a:t>
             </a:r>
             <a:r>
               <a:rPr sz="1150" b="0">
@@ -14215,7 +14215,7 @@
                 <a:latin typeface="Times New Roman"/>
                 <a:ea typeface="宋体"/>
               </a:rPr>
-              <a:t>6. </a:t>
+              <a:t>6.</a:t>
             </a:r>
             <a:r>
               <a:rPr sz="1150" b="0">
@@ -14225,7 +14225,7 @@
                 <a:latin typeface="Times New Roman"/>
                 <a:ea typeface="宋体"/>
               </a:rPr>
-              <a:t>【作业题1】某电影院对学生和普通观众实行差别票价。学生需求函数为 Q_s = 200 - 10P，普通观众需求函数为 Q_g = 500 - 10P。若票价统一为 15 元，求两类观众各自的点价格弹性，并分析调价方向。</a:t>
+              <a:t>【作业题1】某电影院对学生和普通观众实行差别票价。学生需求函数为 Qs = 200 - 10P，普通观众需求函数为 Q_g = 500 - 10P。若票价统一为 15 元，求两类观众各自的点价格弹性，并分析调价方向。</a:t>
             </a:r>
           </a:p>
           <a:p>
@@ -14245,7 +14245,7 @@
                 <a:latin typeface="Times New Roman"/>
                 <a:ea typeface="宋体"/>
               </a:rPr>
-              <a:t>7. </a:t>
+              <a:t>7.</a:t>
             </a:r>
             <a:r>
               <a:rPr sz="1150" b="0">
@@ -14969,7 +14969,7 @@
                 <a:latin typeface="Times New Roman"/>
                 <a:ea typeface="宋体"/>
               </a:rPr>
-              <a:t>  1. 需求价格弹性的经济学本质</a:t>
+              <a:t>1. 需求价格弹性的经济学本质</a:t>
             </a:r>
           </a:p>
         </p:txBody>
@@ -15012,7 +15012,7 @@
                 <a:latin typeface="Times New Roman"/>
                 <a:ea typeface="宋体"/>
               </a:rPr>
-              <a:t>（1）弹性（Elasticity）概念： </a:t>
+              <a:t>（1）弹性（Elasticity）概念：</a:t>
             </a:r>
             <a:r>
               <a:rPr sz="1250" b="0">
@@ -15042,7 +15042,7 @@
                 <a:latin typeface="Times New Roman"/>
                 <a:ea typeface="宋体"/>
               </a:rPr>
-              <a:t>（2）需求价格弹性定义： </a:t>
+              <a:t>（2）需求价格弹性定义：</a:t>
             </a:r>
             <a:r>
               <a:rPr sz="1250" b="0">
@@ -15072,7 +15072,7 @@
                 <a:latin typeface="Times New Roman"/>
                 <a:ea typeface="宋体"/>
               </a:rPr>
-              <a:t>（3）无量纲纯数特征： </a:t>
+              <a:t>（3）无量纲纯数特征：</a:t>
             </a:r>
             <a:r>
               <a:rPr sz="1250" b="0">
@@ -15182,7 +15182,7 @@
                 <a:latin typeface="Times New Roman"/>
                 <a:ea typeface="宋体"/>
               </a:rPr>
-              <a:t>  2. 点价格弹性（Point Elasticity）微分公式</a:t>
+              <a:t>2. 点价格弹性（Point Elasticity）微分公式</a:t>
             </a:r>
           </a:p>
         </p:txBody>
@@ -15225,7 +15225,7 @@
                 <a:latin typeface="Times New Roman"/>
                 <a:ea typeface="宋体"/>
               </a:rPr>
-              <a:t>（1）数学计算公式： </a:t>
+              <a:t>（1）数学计算公式：</a:t>
             </a:r>
             <a:r>
               <a:rPr sz="1250" b="0">
@@ -15235,7 +15235,7 @@
                 <a:latin typeface="Times New Roman"/>
                 <a:ea typeface="宋体"/>
               </a:rPr>
-              <a:t>\epsilon_p = \lim_{\Delta P \to 0} \frac{\Delta Q / Q}{\Delta P / P} = \frac{dQ}{dP} \cdot \frac{P}{Q}</a:t>
+              <a:t>ε_p = lim (Δ Q / Q) / (Δ P / P) = dQ / dP · P / Q</a:t>
             </a:r>
           </a:p>
           <a:p>
@@ -15255,7 +15255,7 @@
                 <a:latin typeface="Times New Roman"/>
                 <a:ea typeface="宋体"/>
               </a:rPr>
-              <a:t>（2）绝对值取值约定： </a:t>
+              <a:t>（2）绝对值取值约定：</a:t>
             </a:r>
             <a:r>
               <a:rPr sz="1250" b="0">
@@ -15265,7 +15265,7 @@
                 <a:latin typeface="Times New Roman"/>
                 <a:ea typeface="宋体"/>
               </a:rPr>
-              <a:t>因需求规律 dQ/dP &lt; 0，\epsilon_p 恒为负值，微观经济学中通常取绝对值 E_p = |\epsilon_p| 进行分析。</a:t>
+              <a:t>因需求规律 dQ/dP &lt; 0，ε_p 恒为负值，微观经济学中通常取绝对值 Ep = |ε_p| 进行分析。</a:t>
             </a:r>
           </a:p>
           <a:p>
@@ -15285,7 +15285,7 @@
                 <a:latin typeface="Times New Roman"/>
                 <a:ea typeface="宋体"/>
               </a:rPr>
-              <a:t>（3）几何切线斜率测算法： </a:t>
+              <a:t>（3）几何切线斜率测算法：</a:t>
             </a:r>
             <a:r>
               <a:rPr sz="1250" b="0">
@@ -15352,7 +15352,7 @@
                 <a:latin typeface="Times New Roman"/>
                 <a:ea typeface="宋体"/>
               </a:rPr>
-              <a:t>  ★ 核心要点：点弹性适用于分析连续需求函数在某一特定价格点处的边际价格敏感度。</a:t>
+              <a:t>★ 核心要点：点弹性适用于分析连续需求函数在某一特定价格点处的边际价格敏感度。</a:t>
             </a:r>
           </a:p>
         </p:txBody>
@@ -15759,7 +15759,7 @@
                 <a:latin typeface="Times New Roman"/>
                 <a:ea typeface="宋体"/>
               </a:rPr>
-              <a:t>  1. 弧价格弹性（Arc Elasticity）中点公式</a:t>
+              <a:t>1. 弧价格弹性（Arc Elasticity）中点公式</a:t>
             </a:r>
           </a:p>
         </p:txBody>
@@ -15802,7 +15802,7 @@
                 <a:latin typeface="Times New Roman"/>
                 <a:ea typeface="宋体"/>
               </a:rPr>
-              <a:t>（1）适用离散场景： </a:t>
+              <a:t>（1）适用离散场景：</a:t>
             </a:r>
             <a:r>
               <a:rPr sz="1250" b="0">
@@ -15832,7 +15832,7 @@
                 <a:latin typeface="Times New Roman"/>
                 <a:ea typeface="宋体"/>
               </a:rPr>
-              <a:t>（2）传统基期计算缺陷： </a:t>
+              <a:t>（2）传统基期计算缺陷：</a:t>
             </a:r>
             <a:r>
               <a:rPr sz="1250" b="0">
@@ -15842,7 +15842,7 @@
                 <a:latin typeface="Times New Roman"/>
                 <a:ea typeface="宋体"/>
               </a:rPr>
-              <a:t>以 P_1 为基期计算的涨价弹性，与以 P_2 为基期计算的降价弹性存在严重数值矛盾。</a:t>
+              <a:t>以 P₁ 为基期计算的涨价弹性，与以 P₂ 为基期计算的降价弹性存在严重数值矛盾。</a:t>
             </a:r>
           </a:p>
           <a:p>
@@ -15862,7 +15862,7 @@
                 <a:latin typeface="Times New Roman"/>
                 <a:ea typeface="宋体"/>
               </a:rPr>
-              <a:t>（3）中点平均标准化公式： </a:t>
+              <a:t>（3）中点平均标准化公式：</a:t>
             </a:r>
             <a:r>
               <a:rPr sz="1250" b="0">
@@ -15872,7 +15872,7 @@
                 <a:latin typeface="Times New Roman"/>
                 <a:ea typeface="宋体"/>
               </a:rPr>
-              <a:t>E_p = \frac{(Q_2 - Q_1) / [(Q_1 + Q_2)/2]}{(P_2 - P_1) / [(P_1 + P_2)/2]} = \frac{\Delta Q}{\Delta P} \cdot \frac{P_1 + P_2}{Q_1 + Q_2}</a:t>
+              <a:t>Ep = ((Q₂ - Q₁) / [(Q₁ + Q₂)/2]) / ((P₂ - P₁) / [(P₁ + P₂)/2]) = (Δ Q) / (Δ P) · (P₁ + P₂) / (Q₁ + Q₂)</a:t>
             </a:r>
           </a:p>
         </p:txBody>
@@ -15972,7 +15972,7 @@
                 <a:latin typeface="Times New Roman"/>
                 <a:ea typeface="宋体"/>
               </a:rPr>
-              <a:t>  2. 例2-1 影院票价调整实操演算</a:t>
+              <a:t>2. 例2-1 影院票价调整实操演算</a:t>
             </a:r>
           </a:p>
         </p:txBody>
@@ -16015,7 +16015,7 @@
                 <a:latin typeface="Times New Roman"/>
                 <a:ea typeface="宋体"/>
               </a:rPr>
-              <a:t>（1）题设已知： </a:t>
+              <a:t>（1）题设已知：</a:t>
             </a:r>
             <a:r>
               <a:rPr sz="1250" b="0">
@@ -16025,7 +16025,7 @@
                 <a:latin typeface="Times New Roman"/>
                 <a:ea typeface="宋体"/>
               </a:rPr>
-              <a:t>某影院原票价 P_1=40元 时观影人数 Q_1=80人；现票价降至 P_2=30元，观影人数激增至 Q_2=120人。</a:t>
+              <a:t>某影院原票价 P₁=40元 时观影人数 Q₁=80人；现票价降至 P₂=30元，观影人数激增至 Q₂=120人。</a:t>
             </a:r>
           </a:p>
           <a:p>
@@ -16045,7 +16045,7 @@
                 <a:latin typeface="Times New Roman"/>
                 <a:ea typeface="宋体"/>
               </a:rPr>
-              <a:t>（2）代入中点公式： </a:t>
+              <a:t>（2）代入中点公式：</a:t>
             </a:r>
             <a:r>
               <a:rPr sz="1250" b="0">
@@ -16055,7 +16055,7 @@
                 <a:latin typeface="Times New Roman"/>
                 <a:ea typeface="宋体"/>
               </a:rPr>
-              <a:t>E_p = \frac{120 - 80}{30 - 40} \cdot \frac{40 + 30}{80 + 120} = \frac{40}{-10} \cdot \frac{70}{200} = |-1.4| = 1.4</a:t>
+              <a:t>Ep = (120 - 80) / (30 - 40) · (40 + 30) / (80 + 120) = 40 / (-10) · 70 / 200 = |-1.4| = 1.4</a:t>
             </a:r>
           </a:p>
           <a:p>
@@ -16075,7 +16075,7 @@
                 <a:latin typeface="Times New Roman"/>
                 <a:ea typeface="宋体"/>
               </a:rPr>
-              <a:t>（3）经济学判定： </a:t>
+              <a:t>（3）经济学判定：</a:t>
             </a:r>
             <a:r>
               <a:rPr sz="1250" b="0">
@@ -16085,7 +16085,7 @@
                 <a:latin typeface="Times New Roman"/>
                 <a:ea typeface="宋体"/>
               </a:rPr>
-              <a:t>E_p = 1.4 &gt; 1，属于富有弹性，降价使得影院总门票收入从 3200元 增加至 3600元，调价成功！</a:t>
+              <a:t>Ep = 1.4 &gt; 1，属于富有弹性，降价使得影院总门票收入从 3200元 增加至 3600元，调价成功！</a:t>
             </a:r>
           </a:p>
         </p:txBody>
@@ -16142,7 +16142,7 @@
                 <a:latin typeface="Times New Roman"/>
                 <a:ea typeface="宋体"/>
               </a:rPr>
-              <a:t>  ★ 核心要点：中点公式彻底消除了方向偏误，是企业在日常经营中评估大幅度调价效果的标准工具。</a:t>
+              <a:t>★ 核心要点：中点公式彻底消除了方向偏误，是企业在日常经营中评估大幅度调价效果的标准工具。</a:t>
             </a:r>
           </a:p>
         </p:txBody>
@@ -16718,7 +16718,7 @@
                 <a:latin typeface="Times New Roman"/>
                 <a:ea typeface="宋体"/>
               </a:rPr>
-              <a:t>（1）几何形态： </a:t>
+              <a:t>（1）几何形态：</a:t>
             </a:r>
             <a:r>
               <a:rPr sz="1200" b="0">
@@ -16748,7 +16748,7 @@
                 <a:latin typeface="Times New Roman"/>
                 <a:ea typeface="宋体"/>
               </a:rPr>
-              <a:t>（2）特征： </a:t>
+              <a:t>（2）特征：</a:t>
             </a:r>
             <a:r>
               <a:rPr sz="1200" b="0">
@@ -16778,7 +16778,7 @@
                 <a:latin typeface="Times New Roman"/>
                 <a:ea typeface="宋体"/>
               </a:rPr>
-              <a:t>（3）现实范例： </a:t>
+              <a:t>（3）现实范例：</a:t>
             </a:r>
             <a:r>
               <a:rPr sz="1200" b="0">
@@ -17057,7 +17057,7 @@
                 <a:latin typeface="Times New Roman"/>
                 <a:ea typeface="宋体"/>
               </a:rPr>
-              <a:t>（1）几何形态： </a:t>
+              <a:t>（1）几何形态：</a:t>
             </a:r>
             <a:r>
               <a:rPr sz="1200" b="0">
@@ -17087,7 +17087,7 @@
                 <a:latin typeface="Times New Roman"/>
                 <a:ea typeface="宋体"/>
               </a:rPr>
-              <a:t>（2）特征： </a:t>
+              <a:t>（2）特征：</a:t>
             </a:r>
             <a:r>
               <a:rPr sz="1200" b="0">
@@ -17117,7 +17117,7 @@
                 <a:latin typeface="Times New Roman"/>
                 <a:ea typeface="宋体"/>
               </a:rPr>
-              <a:t>（3）现实范例： </a:t>
+              <a:t>（3）现实范例：</a:t>
             </a:r>
             <a:r>
               <a:rPr sz="1200" b="0">
@@ -17396,7 +17396,7 @@
                 <a:latin typeface="Times New Roman"/>
                 <a:ea typeface="宋体"/>
               </a:rPr>
-              <a:t>（1）几何形态： </a:t>
+              <a:t>（1）几何形态：</a:t>
             </a:r>
             <a:r>
               <a:rPr sz="1200" b="0">
@@ -17426,7 +17426,7 @@
                 <a:latin typeface="Times New Roman"/>
                 <a:ea typeface="宋体"/>
               </a:rPr>
-              <a:t>（2）特征： </a:t>
+              <a:t>（2）特征：</a:t>
             </a:r>
             <a:r>
               <a:rPr sz="1200" b="0">
@@ -17456,7 +17456,7 @@
                 <a:latin typeface="Times New Roman"/>
                 <a:ea typeface="宋体"/>
               </a:rPr>
-              <a:t>（3）收益特征： </a:t>
+              <a:t>（3）收益特征：</a:t>
             </a:r>
             <a:r>
               <a:rPr sz="1200" b="0">
@@ -17735,7 +17735,7 @@
                 <a:latin typeface="Times New Roman"/>
                 <a:ea typeface="宋体"/>
               </a:rPr>
-              <a:t>（1）几何形态： </a:t>
+              <a:t>（1）几何形态：</a:t>
             </a:r>
             <a:r>
               <a:rPr sz="1200" b="0">
@@ -17765,7 +17765,7 @@
                 <a:latin typeface="Times New Roman"/>
                 <a:ea typeface="宋体"/>
               </a:rPr>
-              <a:t>（2）特征： </a:t>
+              <a:t>（2）特征：</a:t>
             </a:r>
             <a:r>
               <a:rPr sz="1200" b="0">
@@ -17795,7 +17795,7 @@
                 <a:latin typeface="Times New Roman"/>
                 <a:ea typeface="宋体"/>
               </a:rPr>
-              <a:t>（3）现实范例： </a:t>
+              <a:t>（3）现实范例：</a:t>
             </a:r>
             <a:r>
               <a:rPr sz="1200" b="0">
@@ -17862,7 +17862,7 @@
                 <a:latin typeface="Times New Roman"/>
                 <a:ea typeface="宋体"/>
               </a:rPr>
-              <a:t>  ★ 重点启示：精准界定自身产品所处的弹性形态区间，是实施精准商业定价的前提。</a:t>
+              <a:t>★ 重点启示：精准界定自身产品所处的弹性形态区间，是实施精准商业定价的前提。</a:t>
             </a:r>
           </a:p>
         </p:txBody>
@@ -18269,7 +18269,7 @@
                 <a:latin typeface="Times New Roman"/>
                 <a:ea typeface="宋体"/>
               </a:rPr>
-              <a:t>  1. 总收益函数一阶导数展开证明</a:t>
+              <a:t>1. 总收益函数一阶导数展开证明</a:t>
             </a:r>
           </a:p>
         </p:txBody>
@@ -18312,7 +18312,7 @@
                 <a:latin typeface="Times New Roman"/>
                 <a:ea typeface="宋体"/>
               </a:rPr>
-              <a:t>（1）总收益定义： </a:t>
+              <a:t>（1）总收益定义：</a:t>
             </a:r>
             <a:r>
               <a:rPr sz="1250" b="0">
@@ -18322,7 +18322,7 @@
                 <a:latin typeface="Times New Roman"/>
                 <a:ea typeface="宋体"/>
               </a:rPr>
-              <a:t>TR(P) = P \cdot Q(P)</a:t>
+              <a:t>TR(P) = P · Q(P)</a:t>
             </a:r>
           </a:p>
           <a:p>
@@ -18342,7 +18342,7 @@
                 <a:latin typeface="Times New Roman"/>
                 <a:ea typeface="宋体"/>
               </a:rPr>
-              <a:t>（2）对价格 P 求一阶导数： </a:t>
+              <a:t>（2）对价格 P 求一阶导数：</a:t>
             </a:r>
             <a:r>
               <a:rPr sz="1250" b="0">
@@ -18352,7 +18352,7 @@
                 <a:latin typeface="Times New Roman"/>
                 <a:ea typeface="宋体"/>
               </a:rPr>
-              <a:t>\frac{dTR}{dP} = Q + P \cdot \frac{dQ}{dP} = Q \left[ 1 + \frac{P}{Q} \cdot \frac{dQ}{dP} \right]</a:t>
+              <a:t>dTR / dP = Q + P · dQ / dP = Q [ 1 + P / Q · dQ / dP ]</a:t>
             </a:r>
           </a:p>
           <a:p>
@@ -18372,7 +18372,7 @@
                 <a:latin typeface="Times New Roman"/>
                 <a:ea typeface="宋体"/>
               </a:rPr>
-              <a:t>（3）引入需求点价格弹性 \epsilon_p： </a:t>
+              <a:t>（3）引入需求点价格弹性 ε_p：</a:t>
             </a:r>
             <a:r>
               <a:rPr sz="1250" b="0">
@@ -18382,7 +18382,7 @@
                 <a:latin typeface="Times New Roman"/>
                 <a:ea typeface="宋体"/>
               </a:rPr>
-              <a:t>\frac{dTR}{dP} = Q (1 + \epsilon_p) = Q (1 - |E_p|)</a:t>
+              <a:t>dTR / dP = Q (1 + ε_p) = Q (1 - |Ep|)</a:t>
             </a:r>
           </a:p>
           <a:p>
@@ -18402,7 +18402,7 @@
                 <a:latin typeface="Times New Roman"/>
                 <a:ea typeface="宋体"/>
               </a:rPr>
-              <a:t>（4）极值条件： </a:t>
+              <a:t>（4）极值条件：</a:t>
             </a:r>
             <a:r>
               <a:rPr sz="1250" b="0">
@@ -18412,7 +18412,7 @@
                 <a:latin typeface="Times New Roman"/>
                 <a:ea typeface="宋体"/>
               </a:rPr>
-              <a:t>当且仅当 |E_p| = 1 时，dTR/dP = 0，总收益达到最大值！</a:t>
+              <a:t>当且仅当 |Ep| = 1 时，dTR/dP = 0，总收益达到最大值！</a:t>
             </a:r>
           </a:p>
         </p:txBody>
@@ -18512,7 +18512,7 @@
                 <a:latin typeface="Times New Roman"/>
                 <a:ea typeface="宋体"/>
               </a:rPr>
-              <a:t>  2. 三大弹性区间调价策略法则</a:t>
+              <a:t>2. 三大弹性区间调价策略法则</a:t>
             </a:r>
           </a:p>
         </p:txBody>
@@ -18555,7 +18555,7 @@
                 <a:latin typeface="Times New Roman"/>
                 <a:ea typeface="宋体"/>
               </a:rPr>
-              <a:t>（1）富有弹性区间 (|E_p| &gt; 1)： </a:t>
+              <a:t>（1）富有弹性区间 (|Ep| &gt; 1)：</a:t>
             </a:r>
             <a:r>
               <a:rPr sz="1250" b="0">
@@ -18565,7 +18565,7 @@
                 <a:latin typeface="Times New Roman"/>
                 <a:ea typeface="宋体"/>
               </a:rPr>
-              <a:t>dTR/dP &lt; 0 \implies 价格与总收益反向变动，降价使 TR 增加，提价使 TR 减少（'薄利多销'！）。</a:t>
+              <a:t>dTR/dP &lt; 0 ⇒ 价格与总收益反向变动，降价使 TR 增加，提价使 TR 减少（'薄利多销'！）。</a:t>
             </a:r>
           </a:p>
           <a:p>
@@ -18585,7 +18585,7 @@
                 <a:latin typeface="Times New Roman"/>
                 <a:ea typeface="宋体"/>
               </a:rPr>
-              <a:t>（2）缺乏弹性区间 (|E_p| &lt; 1)： </a:t>
+              <a:t>（2）缺乏弹性区间 (|Ep| &lt; 1)：</a:t>
             </a:r>
             <a:r>
               <a:rPr sz="1250" b="0">
@@ -18595,7 +18595,7 @@
                 <a:latin typeface="Times New Roman"/>
                 <a:ea typeface="宋体"/>
               </a:rPr>
-              <a:t>dTR/dP &gt; 0 \implies 价格与总收益同向变动，提价使 TR 增加，降价使 TR 减少（'薄利亏本'，'谷贱伤农'！）。</a:t>
+              <a:t>dTR/dP &gt; 0 ⇒ 价格与总收益同向变动，提价使 TR 增加，降价使 TR 减少（'薄利亏本'，'谷贱伤农'！）。</a:t>
             </a:r>
           </a:p>
           <a:p>
@@ -18615,7 +18615,7 @@
                 <a:latin typeface="Times New Roman"/>
                 <a:ea typeface="宋体"/>
               </a:rPr>
-              <a:t>（3）单一弹性点 (|E_p| = 1)： </a:t>
+              <a:t>（3）单一弹性点 (|Ep| = 1)：</a:t>
             </a:r>
             <a:r>
               <a:rPr sz="1250" b="0">
@@ -18625,7 +18625,7 @@
                 <a:latin typeface="Times New Roman"/>
                 <a:ea typeface="宋体"/>
               </a:rPr>
-              <a:t>dTR/dP = 0 \implies 此时总收益达到峰值，任何调价都会导致总收益下降。</a:t>
+              <a:t>dTR/dP = 0 ⇒ 此时总收益达到峰值，任何调价都会导致总收益下降。</a:t>
             </a:r>
           </a:p>
         </p:txBody>
@@ -18682,7 +18682,7 @@
                 <a:latin typeface="Times New Roman"/>
                 <a:ea typeface="宋体"/>
               </a:rPr>
-              <a:t>  ★ 核心要点：导数证明确立了微观经济学最核心的调价定理：只有富有弹性的商品才能实行'薄利多销'。</a:t>
+              <a:t>★ 核心要点：导数证明确立了微观经济学最核心的调价定理：只有富有弹性的商品才能实行'薄利多销'。</a:t>
             </a:r>
           </a:p>
         </p:txBody>
@@ -19113,7 +19113,7 @@
                 <a:latin typeface="Times New Roman"/>
                 <a:ea typeface="宋体"/>
               </a:rPr>
-              <a:t>  需求曲线与总收益抛物线对应关系</a:t>
+              <a:t>需求曲线与总收益抛物线对应关系</a:t>
             </a:r>
           </a:p>
         </p:txBody>
@@ -19156,7 +19156,7 @@
                 <a:latin typeface="Times New Roman"/>
                 <a:ea typeface="宋体"/>
               </a:rPr>
-              <a:t>（1）线性需求曲线划分： </a:t>
+              <a:t>（1）线性需求曲线划分：</a:t>
             </a:r>
             <a:r>
               <a:rPr sz="1200" b="0">
@@ -19166,7 +19166,7 @@
                 <a:latin typeface="Times New Roman"/>
                 <a:ea typeface="宋体"/>
               </a:rPr>
-              <a:t>在纵轴截距至中点之间，|E_p| &gt; 1；在中点处，|E_p| = 1；在中点至横轴截距之间，|E_p| &lt; 1。</a:t>
+              <a:t>在纵轴截距至中点之间，|Ep| &gt; 1；在中点处，|Ep| = 1；在中点至横轴截距之间，|Ep| &lt; 1。</a:t>
             </a:r>
           </a:p>
           <a:p>
@@ -19186,7 +19186,7 @@
                 <a:latin typeface="Times New Roman"/>
                 <a:ea typeface="宋体"/>
               </a:rPr>
-              <a:t>（2）对应总收益抛物线： </a:t>
+              <a:t>（2）对应总收益抛物线：</a:t>
             </a:r>
             <a:r>
               <a:rPr sz="1200" b="0">
@@ -19196,7 +19196,7 @@
                 <a:latin typeface="Times New Roman"/>
                 <a:ea typeface="宋体"/>
               </a:rPr>
-              <a:t>随着价格从零上升，TR 呈现倒 U 型抛物线轨迹，在 |E_p|=1 处达到最高顶点。</a:t>
+              <a:t>随着价格从零上升，TR 呈现倒 U 型抛物线轨迹，在 |Ep|=1 处达到最高顶点。</a:t>
             </a:r>
           </a:p>
           <a:p>
@@ -19216,7 +19216,7 @@
                 <a:latin typeface="Times New Roman"/>
                 <a:ea typeface="宋体"/>
               </a:rPr>
-              <a:t>（3）边际收入 MR 对应关系： </a:t>
+              <a:t>（3）边际收入 MR 对应关系：</a:t>
             </a:r>
             <a:r>
               <a:rPr sz="1200" b="0">
@@ -19226,7 +19226,7 @@
                 <a:latin typeface="Times New Roman"/>
                 <a:ea typeface="宋体"/>
               </a:rPr>
-              <a:t>MR = P(1 - 1/|E_p|)。当 |E_p|&gt;1 时 MR&gt;0；当 |E_p|&lt;1 时 MR&lt;0；当 |E_p|=1 时 MR=0。</a:t>
+              <a:t>MR = P(1 - 1/|Ep|)。当 |Ep|&gt;1 时 MR&gt;0；当 |Ep|&lt;1 时 MR&lt;0；当 |Ep|=1 时 MR=0。</a:t>
             </a:r>
           </a:p>
           <a:p>
@@ -19246,7 +19246,7 @@
                 <a:latin typeface="Times New Roman"/>
                 <a:ea typeface="宋体"/>
               </a:rPr>
-              <a:t>（4）企业决策法则： </a:t>
+              <a:t>（4）企业决策法则：</a:t>
             </a:r>
             <a:r>
               <a:rPr sz="1200" b="0">
@@ -19256,7 +19256,7 @@
                 <a:latin typeface="Times New Roman"/>
                 <a:ea typeface="宋体"/>
               </a:rPr>
-              <a:t>理性企业绝不应在 |E_p| &lt; 1 的缺乏弹性区间组织生产（因为此时减少产量不仅能提价增收，还能节省成本！）。</a:t>
+              <a:t>理性企业绝不应在 |Ep| &lt; 1 的缺乏弹性区间组织生产（因为此时减少产量不仅能提价增收，还能节省成本！）。</a:t>
             </a:r>
           </a:p>
         </p:txBody>
@@ -19313,7 +19313,7 @@
                 <a:latin typeface="Times New Roman"/>
                 <a:ea typeface="宋体"/>
               </a:rPr>
-              <a:t>  ★ 理论精要：企业欲实现利润最大化，其定价位置必然落在需求曲线的上半段（富有弹性区间）。</a:t>
+              <a:t>★ 理论精要：企业欲实现利润最大化，其定价位置必然落在需求曲线的上半段（富有弹性区间）。</a:t>
             </a:r>
           </a:p>
         </p:txBody>
@@ -19720,7 +19720,7 @@
                 <a:latin typeface="Times New Roman"/>
                 <a:ea typeface="宋体"/>
               </a:rPr>
-              <a:t>  1. 替代品与预算比重</a:t>
+              <a:t>1. 替代品与预算比重</a:t>
             </a:r>
           </a:p>
         </p:txBody>
@@ -19763,7 +19763,7 @@
                 <a:latin typeface="Times New Roman"/>
                 <a:ea typeface="宋体"/>
               </a:rPr>
-              <a:t>（1）替代品数量与相近程度： </a:t>
+              <a:t>（1）替代品数量与相近程度：</a:t>
             </a:r>
             <a:r>
               <a:rPr sz="1200" b="0">
@@ -19793,7 +19793,7 @@
                 <a:latin typeface="Times New Roman"/>
                 <a:ea typeface="宋体"/>
               </a:rPr>
-              <a:t>（2）支出占总预算的比重： </a:t>
+              <a:t>（2）支出占总预算的比重：</a:t>
             </a:r>
             <a:r>
               <a:rPr sz="1200" b="0">
@@ -19903,7 +19903,7 @@
                 <a:latin typeface="Times New Roman"/>
                 <a:ea typeface="宋体"/>
               </a:rPr>
-              <a:t>  2. 商品属性与用途</a:t>
+              <a:t>2. 商品属性与用途</a:t>
             </a:r>
           </a:p>
         </p:txBody>
@@ -19946,7 +19946,7 @@
                 <a:latin typeface="Times New Roman"/>
                 <a:ea typeface="宋体"/>
               </a:rPr>
-              <a:t>（3）必需品 vs 奢侈品： </a:t>
+              <a:t>（3）必需品 vs 奢侈品：</a:t>
             </a:r>
             <a:r>
               <a:rPr sz="1200" b="0">
@@ -19976,7 +19976,7 @@
                 <a:latin typeface="Times New Roman"/>
                 <a:ea typeface="宋体"/>
               </a:rPr>
-              <a:t>（4）商品用途的广泛程度： </a:t>
+              <a:t>（4）商品用途的广泛程度：</a:t>
             </a:r>
             <a:r>
               <a:rPr sz="1200" b="0">
@@ -20086,7 +20086,7 @@
                 <a:latin typeface="Times New Roman"/>
                 <a:ea typeface="宋体"/>
               </a:rPr>
-              <a:t>  3. 调整时间跨度</a:t>
+              <a:t>3. 调整时间跨度</a:t>
             </a:r>
           </a:p>
         </p:txBody>
@@ -20129,7 +20129,7 @@
                 <a:latin typeface="Times New Roman"/>
                 <a:ea typeface="宋体"/>
               </a:rPr>
-              <a:t>（5）调整时间长短： </a:t>
+              <a:t>（5）调整时间长短：</a:t>
             </a:r>
             <a:r>
               <a:rPr sz="1200" b="0">
@@ -20196,7 +20196,7 @@
                 <a:latin typeface="Times New Roman"/>
                 <a:ea typeface="宋体"/>
               </a:rPr>
-              <a:t>  ★ 核心要点：综合评估五大因素是企业在制定新产品定价策略与预测调价市场冲击时的必修基本功。</a:t>
+              <a:t>★ 核心要点：综合评估五大因素是企业在制定新产品定价策略与预测调价市场冲击时的必修基本功。</a:t>
             </a:r>
           </a:p>
         </p:txBody>
